--- a/super_store1.pptx
+++ b/super_store1.pptx
@@ -1,19 +1,17 @@
 
 <file path=ppt/presentation.xml><?xml version="1.0" encoding="utf-8"?>
-<p:presentation xmlns:a="http://schemas.openxmlformats.org/drawingml/2006/main" xmlns:p="http://schemas.openxmlformats.org/presentationml/2006/main" xmlns:r="http://schemas.openxmlformats.org/officeDocument/2006/relationships" saveSubsetFonts="1">
+<p:presentation xmlns:a="http://schemas.openxmlformats.org/drawingml/2006/main" xmlns:r="http://schemas.openxmlformats.org/officeDocument/2006/relationships" xmlns:p="http://schemas.openxmlformats.org/presentationml/2006/main" saveSubsetFonts="1">
   <p:sldMasterIdLst>
     <p:sldMasterId id="2147483648" r:id="rId1"/>
   </p:sldMasterIdLst>
   <p:sldIdLst>
-    <p:sldId id="256" r:id="rId6"/>
-    <p:sldId id="257" r:id="rId7"/>
-    <p:sldId id="258" r:id="rId8"/>
-    <p:sldId id="259" r:id="rId9"/>
-    <p:sldId id="260" r:id="rId10"/>
-    <p:sldId id="261" r:id="rId11"/>
-    <p:sldId id="262" r:id="rId12"/>
-    <p:sldId id="263" r:id="rId13"/>
-    <p:sldId id="264" r:id="rId14"/>
+    <p:sldId id="256" r:id="rId2"/>
+    <p:sldId id="258" r:id="rId3"/>
+    <p:sldId id="259" r:id="rId4"/>
+    <p:sldId id="261" r:id="rId5"/>
+    <p:sldId id="262" r:id="rId6"/>
+    <p:sldId id="263" r:id="rId7"/>
+    <p:sldId id="264" r:id="rId8"/>
   </p:sldIdLst>
   <p:sldSz cx="12192000" cy="6858000"/>
   <p:notesSz cx="6858000" cy="9144000"/>
@@ -21,8 +19,8 @@
     <a:defPPr>
       <a:defRPr lang="en-US"/>
     </a:defPPr>
-    <a:lvl1pPr algn="l" defTabSz="914400" eaLnBrk="1" hangingPunct="1" latinLnBrk="0" marL="0" rtl="0">
-      <a:defRPr kern="1200" sz="1800">
+    <a:lvl1pPr marL="0" algn="l" defTabSz="914400" rtl="0" eaLnBrk="1" latinLnBrk="0" hangingPunct="1">
+      <a:defRPr sz="1800" kern="1200">
         <a:solidFill>
           <a:schemeClr val="tx1"/>
         </a:solidFill>
@@ -31,8 +29,8 @@
         <a:cs typeface="+mn-cs"/>
       </a:defRPr>
     </a:lvl1pPr>
-    <a:lvl2pPr algn="l" defTabSz="914400" eaLnBrk="1" hangingPunct="1" latinLnBrk="0" marL="457200" rtl="0">
-      <a:defRPr kern="1200" sz="1800">
+    <a:lvl2pPr marL="457200" algn="l" defTabSz="914400" rtl="0" eaLnBrk="1" latinLnBrk="0" hangingPunct="1">
+      <a:defRPr sz="1800" kern="1200">
         <a:solidFill>
           <a:schemeClr val="tx1"/>
         </a:solidFill>
@@ -41,8 +39,8 @@
         <a:cs typeface="+mn-cs"/>
       </a:defRPr>
     </a:lvl2pPr>
-    <a:lvl3pPr algn="l" defTabSz="914400" eaLnBrk="1" hangingPunct="1" latinLnBrk="0" marL="914400" rtl="0">
-      <a:defRPr kern="1200" sz="1800">
+    <a:lvl3pPr marL="914400" algn="l" defTabSz="914400" rtl="0" eaLnBrk="1" latinLnBrk="0" hangingPunct="1">
+      <a:defRPr sz="1800" kern="1200">
         <a:solidFill>
           <a:schemeClr val="tx1"/>
         </a:solidFill>
@@ -51,8 +49,8 @@
         <a:cs typeface="+mn-cs"/>
       </a:defRPr>
     </a:lvl3pPr>
-    <a:lvl4pPr algn="l" defTabSz="914400" eaLnBrk="1" hangingPunct="1" latinLnBrk="0" marL="1371600" rtl="0">
-      <a:defRPr kern="1200" sz="1800">
+    <a:lvl4pPr marL="1371600" algn="l" defTabSz="914400" rtl="0" eaLnBrk="1" latinLnBrk="0" hangingPunct="1">
+      <a:defRPr sz="1800" kern="1200">
         <a:solidFill>
           <a:schemeClr val="tx1"/>
         </a:solidFill>
@@ -61,8 +59,8 @@
         <a:cs typeface="+mn-cs"/>
       </a:defRPr>
     </a:lvl4pPr>
-    <a:lvl5pPr algn="l" defTabSz="914400" eaLnBrk="1" hangingPunct="1" latinLnBrk="0" marL="1828800" rtl="0">
-      <a:defRPr kern="1200" sz="1800">
+    <a:lvl5pPr marL="1828800" algn="l" defTabSz="914400" rtl="0" eaLnBrk="1" latinLnBrk="0" hangingPunct="1">
+      <a:defRPr sz="1800" kern="1200">
         <a:solidFill>
           <a:schemeClr val="tx1"/>
         </a:solidFill>
@@ -71,8 +69,8 @@
         <a:cs typeface="+mn-cs"/>
       </a:defRPr>
     </a:lvl5pPr>
-    <a:lvl6pPr algn="l" defTabSz="914400" eaLnBrk="1" hangingPunct="1" latinLnBrk="0" marL="2286000" rtl="0">
-      <a:defRPr kern="1200" sz="1800">
+    <a:lvl6pPr marL="2286000" algn="l" defTabSz="914400" rtl="0" eaLnBrk="1" latinLnBrk="0" hangingPunct="1">
+      <a:defRPr sz="1800" kern="1200">
         <a:solidFill>
           <a:schemeClr val="tx1"/>
         </a:solidFill>
@@ -81,8 +79,8 @@
         <a:cs typeface="+mn-cs"/>
       </a:defRPr>
     </a:lvl6pPr>
-    <a:lvl7pPr algn="l" defTabSz="914400" eaLnBrk="1" hangingPunct="1" latinLnBrk="0" marL="2743200" rtl="0">
-      <a:defRPr kern="1200" sz="1800">
+    <a:lvl7pPr marL="2743200" algn="l" defTabSz="914400" rtl="0" eaLnBrk="1" latinLnBrk="0" hangingPunct="1">
+      <a:defRPr sz="1800" kern="1200">
         <a:solidFill>
           <a:schemeClr val="tx1"/>
         </a:solidFill>
@@ -91,8 +89,8 @@
         <a:cs typeface="+mn-cs"/>
       </a:defRPr>
     </a:lvl7pPr>
-    <a:lvl8pPr algn="l" defTabSz="914400" eaLnBrk="1" hangingPunct="1" latinLnBrk="0" marL="3200400" rtl="0">
-      <a:defRPr kern="1200" sz="1800">
+    <a:lvl8pPr marL="3200400" algn="l" defTabSz="914400" rtl="0" eaLnBrk="1" latinLnBrk="0" hangingPunct="1">
+      <a:defRPr sz="1800" kern="1200">
         <a:solidFill>
           <a:schemeClr val="tx1"/>
         </a:solidFill>
@@ -101,8 +99,8 @@
         <a:cs typeface="+mn-cs"/>
       </a:defRPr>
     </a:lvl8pPr>
-    <a:lvl9pPr algn="l" defTabSz="914400" eaLnBrk="1" hangingPunct="1" latinLnBrk="0" marL="3657600" rtl="0">
-      <a:defRPr kern="1200" sz="1800">
+    <a:lvl9pPr marL="3657600" algn="l" defTabSz="914400" rtl="0" eaLnBrk="1" latinLnBrk="0" hangingPunct="1">
+      <a:defRPr sz="1800" kern="1200">
         <a:solidFill>
           <a:schemeClr val="tx1"/>
         </a:solidFill>
@@ -112,7 +110,40 @@
       </a:defRPr>
     </a:lvl9pPr>
   </p:defaultTextStyle>
+  <p:extLst>
+    <p:ext uri="{EFAFB233-063F-42B5-8137-9DF3F51BA10A}">
+      <p15:sldGuideLst xmlns:p15="http://schemas.microsoft.com/office/powerpoint/2012/main"/>
+    </p:ext>
+  </p:extLst>
 </p:presentation>
+</file>
+
+<file path=ppt/changesInfos/changesInfo1.xml><?xml version="1.0" encoding="utf-8"?>
+<pc:chgInfo xmlns:a="http://schemas.openxmlformats.org/drawingml/2006/main" xmlns:r="http://schemas.openxmlformats.org/officeDocument/2006/relationships" xmlns:ac="http://schemas.microsoft.com/office/drawing/2013/main/command" xmlns:pc="http://schemas.microsoft.com/office/powerpoint/2013/main/command">
+  <pc:docChgLst>
+    <pc:chgData name="Georgie Mbianda Njencheu" userId="ab1535687a26c724" providerId="LiveId" clId="{61A69E66-629A-409A-B2EB-98325437BBED}"/>
+    <pc:docChg chg="delSld">
+      <pc:chgData name="Georgie Mbianda Njencheu" userId="ab1535687a26c724" providerId="LiveId" clId="{61A69E66-629A-409A-B2EB-98325437BBED}" dt="2025-06-19T14:22:24.635" v="1" actId="2696"/>
+      <pc:docMkLst>
+        <pc:docMk/>
+      </pc:docMkLst>
+      <pc:sldChg chg="del">
+        <pc:chgData name="Georgie Mbianda Njencheu" userId="ab1535687a26c724" providerId="LiveId" clId="{61A69E66-629A-409A-B2EB-98325437BBED}" dt="2025-06-19T14:22:24.635" v="1" actId="2696"/>
+        <pc:sldMkLst>
+          <pc:docMk/>
+          <pc:sldMk cId="95992585" sldId="257"/>
+        </pc:sldMkLst>
+      </pc:sldChg>
+      <pc:sldChg chg="del">
+        <pc:chgData name="Georgie Mbianda Njencheu" userId="ab1535687a26c724" providerId="LiveId" clId="{61A69E66-629A-409A-B2EB-98325437BBED}" dt="2025-06-19T14:21:14.962" v="0" actId="2696"/>
+        <pc:sldMkLst>
+          <pc:docMk/>
+          <pc:sldMk cId="95992585" sldId="260"/>
+        </pc:sldMkLst>
+      </pc:sldChg>
+    </pc:docChg>
+  </pc:docChgLst>
+</pc:chgInfo>
 </file>
 
 <file path=ppt/slideLayouts/slideLayout1.xml><?xml version="1.0" encoding="utf-8"?>
@@ -262,7 +293,7 @@
           <a:p>
             <a:fld id="{EED1C14C-A143-42F5-B247-D0E800131009}" type="datetimeFigureOut">
               <a:rPr lang="en-US" smtClean="0"/>
-              <a:t>8/15/2018</a:t>
+              <a:t>6/19/2025</a:t>
             </a:fld>
             <a:endParaRPr lang="en-US"/>
           </a:p>
@@ -460,7 +491,7 @@
           <a:p>
             <a:fld id="{EED1C14C-A143-42F5-B247-D0E800131009}" type="datetimeFigureOut">
               <a:rPr lang="en-US" smtClean="0"/>
-              <a:t>8/15/2018</a:t>
+              <a:t>6/19/2025</a:t>
             </a:fld>
             <a:endParaRPr lang="en-US"/>
           </a:p>
@@ -668,7 +699,7 @@
           <a:p>
             <a:fld id="{EED1C14C-A143-42F5-B247-D0E800131009}" type="datetimeFigureOut">
               <a:rPr lang="en-US" smtClean="0"/>
-              <a:t>8/15/2018</a:t>
+              <a:t>6/19/2025</a:t>
             </a:fld>
             <a:endParaRPr lang="en-US"/>
           </a:p>
@@ -866,7 +897,7 @@
           <a:p>
             <a:fld id="{EED1C14C-A143-42F5-B247-D0E800131009}" type="datetimeFigureOut">
               <a:rPr lang="en-US" smtClean="0"/>
-              <a:t>8/15/2018</a:t>
+              <a:t>6/19/2025</a:t>
             </a:fld>
             <a:endParaRPr lang="en-US"/>
           </a:p>
@@ -1141,7 +1172,7 @@
           <a:p>
             <a:fld id="{EED1C14C-A143-42F5-B247-D0E800131009}" type="datetimeFigureOut">
               <a:rPr lang="en-US" smtClean="0"/>
-              <a:t>8/15/2018</a:t>
+              <a:t>6/19/2025</a:t>
             </a:fld>
             <a:endParaRPr lang="en-US"/>
           </a:p>
@@ -1406,7 +1437,7 @@
           <a:p>
             <a:fld id="{EED1C14C-A143-42F5-B247-D0E800131009}" type="datetimeFigureOut">
               <a:rPr lang="en-US" smtClean="0"/>
-              <a:t>8/15/2018</a:t>
+              <a:t>6/19/2025</a:t>
             </a:fld>
             <a:endParaRPr lang="en-US"/>
           </a:p>
@@ -1818,7 +1849,7 @@
           <a:p>
             <a:fld id="{EED1C14C-A143-42F5-B247-D0E800131009}" type="datetimeFigureOut">
               <a:rPr lang="en-US" smtClean="0"/>
-              <a:t>8/15/2018</a:t>
+              <a:t>6/19/2025</a:t>
             </a:fld>
             <a:endParaRPr lang="en-US"/>
           </a:p>
@@ -1959,7 +1990,7 @@
           <a:p>
             <a:fld id="{EED1C14C-A143-42F5-B247-D0E800131009}" type="datetimeFigureOut">
               <a:rPr lang="en-US" smtClean="0"/>
-              <a:t>8/15/2018</a:t>
+              <a:t>6/19/2025</a:t>
             </a:fld>
             <a:endParaRPr lang="en-US"/>
           </a:p>
@@ -2072,7 +2103,7 @@
           <a:p>
             <a:fld id="{EED1C14C-A143-42F5-B247-D0E800131009}" type="datetimeFigureOut">
               <a:rPr lang="en-US" smtClean="0"/>
-              <a:t>8/15/2018</a:t>
+              <a:t>6/19/2025</a:t>
             </a:fld>
             <a:endParaRPr lang="en-US"/>
           </a:p>
@@ -2383,7 +2414,7 @@
           <a:p>
             <a:fld id="{EED1C14C-A143-42F5-B247-D0E800131009}" type="datetimeFigureOut">
               <a:rPr lang="en-US" smtClean="0"/>
-              <a:t>8/15/2018</a:t>
+              <a:t>6/19/2025</a:t>
             </a:fld>
             <a:endParaRPr lang="en-US"/>
           </a:p>
@@ -2671,7 +2702,7 @@
           <a:p>
             <a:fld id="{EED1C14C-A143-42F5-B247-D0E800131009}" type="datetimeFigureOut">
               <a:rPr lang="en-US" smtClean="0"/>
-              <a:t>8/15/2018</a:t>
+              <a:t>6/19/2025</a:t>
             </a:fld>
             <a:endParaRPr lang="en-US"/>
           </a:p>
@@ -2912,7 +2943,7 @@
           <a:p>
             <a:fld id="{EED1C14C-A143-42F5-B247-D0E800131009}" type="datetimeFigureOut">
               <a:rPr lang="en-US" smtClean="0"/>
-              <a:t>8/15/2018</a:t>
+              <a:t>6/19/2025</a:t>
             </a:fld>
             <a:endParaRPr lang="en-US"/>
           </a:p>
@@ -3313,7 +3344,7 @@
 </file>
 
 <file path=ppt/slides/slide1.xml><?xml version="1.0" encoding="utf-8"?>
-<p:sld xmlns:a="http://schemas.openxmlformats.org/drawingml/2006/main" xmlns:p="http://schemas.openxmlformats.org/presentationml/2006/main" xmlns:r="http://schemas.openxmlformats.org/officeDocument/2006/relationships">
+<p:sld xmlns:a="http://schemas.openxmlformats.org/drawingml/2006/main" xmlns:r="http://schemas.openxmlformats.org/officeDocument/2006/relationships" xmlns:p="http://schemas.openxmlformats.org/presentationml/2006/main">
   <p:cSld>
     <p:spTree>
       <p:nvGrpSpPr>
@@ -3331,7 +3362,7 @@
       </p:grpSpPr>
       <p:sp>
         <p:nvSpPr>
-          <p:cNvPr id="0" name="slide1">
+          <p:cNvPr id="2" name="slide1">
             <a:extLst>
               <a:ext uri="{FF2B5EF4-FFF2-40B4-BE49-F238E27FC236}">
                 <a16:creationId xmlns:a16="http://schemas.microsoft.com/office/drawing/2014/main" id="{D9CFED65-33EC-43DE-AC30-2FA87EF4B389}"/>
@@ -3342,7 +3373,7 @@
             <a:spLocks noGrp="1"/>
           </p:cNvSpPr>
           <p:nvPr>
-            <p:ph idx="0" type="ctrTitle"/>
+            <p:ph type="ctrTitle"/>
           </p:nvPr>
         </p:nvSpPr>
         <p:spPr/>
@@ -3351,7 +3382,6 @@
           <a:lstStyle/>
           <a:p>
             <a:r>
-              <a:rPr/>
               <a:t>super_store1</a:t>
             </a:r>
           </a:p>
@@ -3359,7 +3389,7 @@
       </p:sp>
       <p:sp>
         <p:nvSpPr>
-          <p:cNvPr id="1" name="slide1">
+          <p:cNvPr id="3" name="slide1">
             <a:extLst>
               <a:ext uri="{FF2B5EF4-FFF2-40B4-BE49-F238E27FC236}">
                 <a16:creationId xmlns:a16="http://schemas.microsoft.com/office/drawing/2014/main" id="{464B10D5-9907-4DF4-AED2-B7BCE543B83D}"/>
@@ -3370,7 +3400,7 @@
             <a:spLocks noGrp="1"/>
           </p:cNvSpPr>
           <p:nvPr>
-            <p:ph idx="1" type="subTitle"/>
+            <p:ph type="subTitle" idx="1"/>
           </p:nvPr>
         </p:nvSpPr>
         <p:spPr/>
@@ -3379,7 +3409,6 @@
           <a:lstStyle/>
           <a:p>
             <a:r>
-              <a:rPr/>
               <a:t>File created on: 5/29/2025 11:27:26 AM</a:t>
             </a:r>
           </a:p>
@@ -3399,7 +3428,7 @@
 </file>
 
 <file path=ppt/slides/slide2.xml><?xml version="1.0" encoding="utf-8"?>
-<p:sld xmlns:a="http://schemas.openxmlformats.org/drawingml/2006/main" xmlns:p="http://schemas.openxmlformats.org/presentationml/2006/main" xmlns:r="http://schemas.openxmlformats.org/officeDocument/2006/relationships">
+<p:sld xmlns:a="http://schemas.openxmlformats.org/drawingml/2006/main" xmlns:r="http://schemas.openxmlformats.org/officeDocument/2006/relationships" xmlns:p="http://schemas.openxmlformats.org/presentationml/2006/main">
   <p:cSld>
     <p:spTree>
       <p:nvGrpSpPr>
@@ -3417,10 +3446,10 @@
       </p:grpSpPr>
       <p:pic>
         <p:nvPicPr>
-          <p:cNvPr descr="Total Gross Profit" id="2" name="slide2">
-            <a:extLst>
-              <a:ext uri="{FF2B5EF4-FFF2-40B4-BE49-F238E27FC236}">
-                <a16:creationId xmlns:a16="http://schemas.microsoft.com/office/drawing/2014/main" id="{625C1E86-F959-4BC8-9DC3-8853CF33EC14}"/>
+          <p:cNvPr id="3" name="slide3" descr="Profit Seasonality">
+            <a:extLst>
+              <a:ext uri="{FF2B5EF4-FFF2-40B4-BE49-F238E27FC236}">
+                <a16:creationId xmlns:a16="http://schemas.microsoft.com/office/drawing/2014/main" id="{A758185F-6007-429E-A5F8-4787B547291F}"/>
               </a:ext>
             </a:extLst>
           </p:cNvPr>
@@ -3430,7 +3459,7 @@
           <p:nvPr/>
         </p:nvPicPr>
         <p:blipFill>
-          <a:blip r:embed="rId7">
+          <a:blip r:embed="rId2">
             <a:extLst>
               <a:ext uri="{28A0092B-C50C-407E-A947-70E740481C1C}">
                 <a14:useLocalDpi xmlns:a14="http://schemas.microsoft.com/office/drawing/2010/main" val="0"/>
@@ -3443,8 +3472,8 @@
         </p:blipFill>
         <p:spPr>
           <a:xfrm>
-            <a:off x="4691062" y="528637"/>
-            <a:ext cx="2809875" cy="5800725"/>
+            <a:off x="1919287" y="504825"/>
+            <a:ext cx="8353425" cy="5848350"/>
           </a:xfrm>
           <a:prstGeom prst="rect">
             <a:avLst/>
@@ -3465,7 +3494,7 @@
 </file>
 
 <file path=ppt/slides/slide3.xml><?xml version="1.0" encoding="utf-8"?>
-<p:sld xmlns:a="http://schemas.openxmlformats.org/drawingml/2006/main" xmlns:p="http://schemas.openxmlformats.org/presentationml/2006/main" xmlns:r="http://schemas.openxmlformats.org/officeDocument/2006/relationships">
+<p:sld xmlns:a="http://schemas.openxmlformats.org/drawingml/2006/main" xmlns:r="http://schemas.openxmlformats.org/officeDocument/2006/relationships" xmlns:p="http://schemas.openxmlformats.org/presentationml/2006/main">
   <p:cSld>
     <p:spTree>
       <p:nvGrpSpPr>
@@ -3483,10 +3512,10 @@
       </p:grpSpPr>
       <p:pic>
         <p:nvPicPr>
-          <p:cNvPr descr="Profit Seasonality" id="3" name="slide3">
-            <a:extLst>
-              <a:ext uri="{FF2B5EF4-FFF2-40B4-BE49-F238E27FC236}">
-                <a16:creationId xmlns:a16="http://schemas.microsoft.com/office/drawing/2014/main" id="{A758185F-6007-429E-A5F8-4787B547291F}"/>
+          <p:cNvPr id="4" name="slide4" descr="Profit Seasonality (2)">
+            <a:extLst>
+              <a:ext uri="{FF2B5EF4-FFF2-40B4-BE49-F238E27FC236}">
+                <a16:creationId xmlns:a16="http://schemas.microsoft.com/office/drawing/2014/main" id="{828D4A63-4D55-4A34-8B62-340EE75F3FE6}"/>
               </a:ext>
             </a:extLst>
           </p:cNvPr>
@@ -3496,7 +3525,7 @@
           <p:nvPr/>
         </p:nvPicPr>
         <p:blipFill>
-          <a:blip r:embed="rId8">
+          <a:blip r:embed="rId2">
             <a:extLst>
               <a:ext uri="{28A0092B-C50C-407E-A947-70E740481C1C}">
                 <a14:useLocalDpi xmlns:a14="http://schemas.microsoft.com/office/drawing/2010/main" val="0"/>
@@ -3531,7 +3560,7 @@
 </file>
 
 <file path=ppt/slides/slide4.xml><?xml version="1.0" encoding="utf-8"?>
-<p:sld xmlns:a="http://schemas.openxmlformats.org/drawingml/2006/main" xmlns:p="http://schemas.openxmlformats.org/presentationml/2006/main" xmlns:r="http://schemas.openxmlformats.org/officeDocument/2006/relationships">
+<p:sld xmlns:a="http://schemas.openxmlformats.org/drawingml/2006/main" xmlns:r="http://schemas.openxmlformats.org/officeDocument/2006/relationships" xmlns:p="http://schemas.openxmlformats.org/presentationml/2006/main">
   <p:cSld>
     <p:spTree>
       <p:nvGrpSpPr>
@@ -3549,10 +3578,10 @@
       </p:grpSpPr>
       <p:pic>
         <p:nvPicPr>
-          <p:cNvPr descr="Profit Seasonality (2)" id="4" name="slide4">
-            <a:extLst>
-              <a:ext uri="{FF2B5EF4-FFF2-40B4-BE49-F238E27FC236}">
-                <a16:creationId xmlns:a16="http://schemas.microsoft.com/office/drawing/2014/main" id="{828D4A63-4D55-4A34-8B62-340EE75F3FE6}"/>
+          <p:cNvPr id="6" name="slide6" descr="Profit &amp;amp; Sales Map">
+            <a:extLst>
+              <a:ext uri="{FF2B5EF4-FFF2-40B4-BE49-F238E27FC236}">
+                <a16:creationId xmlns:a16="http://schemas.microsoft.com/office/drawing/2014/main" id="{2D345E87-4277-4198-8071-60ED8B811BFB}"/>
               </a:ext>
             </a:extLst>
           </p:cNvPr>
@@ -3562,139 +3591,7 @@
           <p:nvPr/>
         </p:nvPicPr>
         <p:blipFill>
-          <a:blip r:embed="rId9">
-            <a:extLst>
-              <a:ext uri="{28A0092B-C50C-407E-A947-70E740481C1C}">
-                <a14:useLocalDpi xmlns:a14="http://schemas.microsoft.com/office/drawing/2010/main" val="0"/>
-              </a:ext>
-            </a:extLst>
-          </a:blip>
-          <a:stretch>
-            <a:fillRect/>
-          </a:stretch>
-        </p:blipFill>
-        <p:spPr>
-          <a:xfrm>
-            <a:off x="1919287" y="504825"/>
-            <a:ext cx="8353425" cy="5848350"/>
-          </a:xfrm>
-          <a:prstGeom prst="rect">
-            <a:avLst/>
-          </a:prstGeom>
-        </p:spPr>
-      </p:pic>
-    </p:spTree>
-    <p:extLst>
-      <p:ext uri="{BB962C8B-B14F-4D97-AF65-F5344CB8AC3E}">
-        <p14:creationId xmlns:p14="http://schemas.microsoft.com/office/powerpoint/2010/main" val="95992585"/>
-      </p:ext>
-    </p:extLst>
-  </p:cSld>
-  <p:clrMapOvr>
-    <a:masterClrMapping/>
-  </p:clrMapOvr>
-</p:sld>
-</file>
-
-<file path=ppt/slides/slide5.xml><?xml version="1.0" encoding="utf-8"?>
-<p:sld xmlns:a="http://schemas.openxmlformats.org/drawingml/2006/main" xmlns:p="http://schemas.openxmlformats.org/presentationml/2006/main" xmlns:r="http://schemas.openxmlformats.org/officeDocument/2006/relationships">
-  <p:cSld>
-    <p:spTree>
-      <p:nvGrpSpPr>
-        <p:cNvPr id="1" name=""/>
-        <p:cNvGrpSpPr/>
-        <p:nvPr/>
-      </p:nvGrpSpPr>
-      <p:grpSpPr>
-        <a:xfrm>
-          <a:off x="0" y="0"/>
-          <a:ext cx="0" cy="0"/>
-          <a:chOff x="0" y="0"/>
-          <a:chExt cx="0" cy="0"/>
-        </a:xfrm>
-      </p:grpSpPr>
-      <p:pic>
-        <p:nvPicPr>
-          <p:cNvPr descr="Profit Crostab" id="5" name="slide5">
-            <a:extLst>
-              <a:ext uri="{FF2B5EF4-FFF2-40B4-BE49-F238E27FC236}">
-                <a16:creationId xmlns:a16="http://schemas.microsoft.com/office/drawing/2014/main" id="{C0FC75AA-E1E7-4C72-9C60-192F2D6637BB}"/>
-              </a:ext>
-            </a:extLst>
-          </p:cNvPr>
-          <p:cNvPicPr>
-            <a:picLocks noChangeAspect="1"/>
-          </p:cNvPicPr>
-          <p:nvPr/>
-        </p:nvPicPr>
-        <p:blipFill>
-          <a:blip r:embed="rId10">
-            <a:extLst>
-              <a:ext uri="{28A0092B-C50C-407E-A947-70E740481C1C}">
-                <a14:useLocalDpi xmlns:a14="http://schemas.microsoft.com/office/drawing/2010/main" val="0"/>
-              </a:ext>
-            </a:extLst>
-          </a:blip>
-          <a:stretch>
-            <a:fillRect/>
-          </a:stretch>
-        </p:blipFill>
-        <p:spPr>
-          <a:xfrm>
-            <a:off x="1919287" y="295275"/>
-            <a:ext cx="8353425" cy="6267450"/>
-          </a:xfrm>
-          <a:prstGeom prst="rect">
-            <a:avLst/>
-          </a:prstGeom>
-        </p:spPr>
-      </p:pic>
-    </p:spTree>
-    <p:extLst>
-      <p:ext uri="{BB962C8B-B14F-4D97-AF65-F5344CB8AC3E}">
-        <p14:creationId xmlns:p14="http://schemas.microsoft.com/office/powerpoint/2010/main" val="95992585"/>
-      </p:ext>
-    </p:extLst>
-  </p:cSld>
-  <p:clrMapOvr>
-    <a:masterClrMapping/>
-  </p:clrMapOvr>
-</p:sld>
-</file>
-
-<file path=ppt/slides/slide6.xml><?xml version="1.0" encoding="utf-8"?>
-<p:sld xmlns:a="http://schemas.openxmlformats.org/drawingml/2006/main" xmlns:p="http://schemas.openxmlformats.org/presentationml/2006/main" xmlns:r="http://schemas.openxmlformats.org/officeDocument/2006/relationships">
-  <p:cSld>
-    <p:spTree>
-      <p:nvGrpSpPr>
-        <p:cNvPr id="1" name=""/>
-        <p:cNvGrpSpPr/>
-        <p:nvPr/>
-      </p:nvGrpSpPr>
-      <p:grpSpPr>
-        <a:xfrm>
-          <a:off x="0" y="0"/>
-          <a:ext cx="0" cy="0"/>
-          <a:chOff x="0" y="0"/>
-          <a:chExt cx="0" cy="0"/>
-        </a:xfrm>
-      </p:grpSpPr>
-      <p:pic>
-        <p:nvPicPr>
-          <p:cNvPr descr="Profit &amp;amp; Sales Map" id="6" name="slide6">
-            <a:extLst>
-              <a:ext uri="{FF2B5EF4-FFF2-40B4-BE49-F238E27FC236}">
-                <a16:creationId xmlns:a16="http://schemas.microsoft.com/office/drawing/2014/main" id="{2D345E87-4277-4198-8071-60ED8B811BFB}"/>
-              </a:ext>
-            </a:extLst>
-          </p:cNvPr>
-          <p:cNvPicPr>
-            <a:picLocks noChangeAspect="1"/>
-          </p:cNvPicPr>
-          <p:nvPr/>
-        </p:nvPicPr>
-        <p:blipFill>
-          <a:blip r:embed="rId11">
+          <a:blip r:embed="rId2">
             <a:extLst>
               <a:ext uri="{28A0092B-C50C-407E-A947-70E740481C1C}">
                 <a14:useLocalDpi xmlns:a14="http://schemas.microsoft.com/office/drawing/2010/main" val="0"/>
@@ -3728,8 +3625,8 @@
 </p:sld>
 </file>
 
-<file path=ppt/slides/slide7.xml><?xml version="1.0" encoding="utf-8"?>
-<p:sld xmlns:a="http://schemas.openxmlformats.org/drawingml/2006/main" xmlns:p="http://schemas.openxmlformats.org/presentationml/2006/main" xmlns:r="http://schemas.openxmlformats.org/officeDocument/2006/relationships">
+<file path=ppt/slides/slide5.xml><?xml version="1.0" encoding="utf-8"?>
+<p:sld xmlns:a="http://schemas.openxmlformats.org/drawingml/2006/main" xmlns:r="http://schemas.openxmlformats.org/officeDocument/2006/relationships" xmlns:p="http://schemas.openxmlformats.org/presentationml/2006/main">
   <p:cSld>
     <p:spTree>
       <p:nvGrpSpPr>
@@ -3747,7 +3644,7 @@
       </p:grpSpPr>
       <p:pic>
         <p:nvPicPr>
-          <p:cNvPr descr="Profit By Subcategory" id="7" name="slide7">
+          <p:cNvPr id="7" name="slide7" descr="Profit By Subcategory">
             <a:extLst>
               <a:ext uri="{FF2B5EF4-FFF2-40B4-BE49-F238E27FC236}">
                 <a16:creationId xmlns:a16="http://schemas.microsoft.com/office/drawing/2014/main" id="{FAD0329E-F66A-4890-99D3-BD3FC67A519A}"/>
@@ -3760,7 +3657,7 @@
           <p:nvPr/>
         </p:nvPicPr>
         <p:blipFill>
-          <a:blip r:embed="rId12">
+          <a:blip r:embed="rId2">
             <a:extLst>
               <a:ext uri="{28A0092B-C50C-407E-A947-70E740481C1C}">
                 <a14:useLocalDpi xmlns:a14="http://schemas.microsoft.com/office/drawing/2010/main" val="0"/>
@@ -3794,8 +3691,8 @@
 </p:sld>
 </file>
 
-<file path=ppt/slides/slide8.xml><?xml version="1.0" encoding="utf-8"?>
-<p:sld xmlns:a="http://schemas.openxmlformats.org/drawingml/2006/main" xmlns:p="http://schemas.openxmlformats.org/presentationml/2006/main" xmlns:r="http://schemas.openxmlformats.org/officeDocument/2006/relationships">
+<file path=ppt/slides/slide6.xml><?xml version="1.0" encoding="utf-8"?>
+<p:sld xmlns:a="http://schemas.openxmlformats.org/drawingml/2006/main" xmlns:r="http://schemas.openxmlformats.org/officeDocument/2006/relationships" xmlns:p="http://schemas.openxmlformats.org/presentationml/2006/main">
   <p:cSld>
     <p:spTree>
       <p:nvGrpSpPr>
@@ -3813,7 +3710,7 @@
       </p:grpSpPr>
       <p:pic>
         <p:nvPicPr>
-          <p:cNvPr descr="Discounts Impacting Profit" id="8" name="slide8">
+          <p:cNvPr id="8" name="slide8" descr="Discounts Impacting Profit">
             <a:extLst>
               <a:ext uri="{FF2B5EF4-FFF2-40B4-BE49-F238E27FC236}">
                 <a16:creationId xmlns:a16="http://schemas.microsoft.com/office/drawing/2014/main" id="{4AAF9F73-87E6-4213-84BB-608A974DB790}"/>
@@ -3826,7 +3723,7 @@
           <p:nvPr/>
         </p:nvPicPr>
         <p:blipFill>
-          <a:blip r:embed="rId13">
+          <a:blip r:embed="rId2">
             <a:extLst>
               <a:ext uri="{28A0092B-C50C-407E-A947-70E740481C1C}">
                 <a14:useLocalDpi xmlns:a14="http://schemas.microsoft.com/office/drawing/2010/main" val="0"/>
@@ -3860,8 +3757,8 @@
 </p:sld>
 </file>
 
-<file path=ppt/slides/slide9.xml><?xml version="1.0" encoding="utf-8"?>
-<p:sld xmlns:a="http://schemas.openxmlformats.org/drawingml/2006/main" xmlns:p="http://schemas.openxmlformats.org/presentationml/2006/main" xmlns:r="http://schemas.openxmlformats.org/officeDocument/2006/relationships">
+<file path=ppt/slides/slide7.xml><?xml version="1.0" encoding="utf-8"?>
+<p:sld xmlns:a="http://schemas.openxmlformats.org/drawingml/2006/main" xmlns:r="http://schemas.openxmlformats.org/officeDocument/2006/relationships" xmlns:p="http://schemas.openxmlformats.org/presentationml/2006/main">
   <p:cSld>
     <p:spTree>
       <p:nvGrpSpPr>
@@ -3879,7 +3776,7 @@
       </p:grpSpPr>
       <p:pic>
         <p:nvPicPr>
-          <p:cNvPr descr="Superstore Profit Analysis" id="9" name="slide9">
+          <p:cNvPr id="9" name="slide9" descr="Superstore Profit Analysis">
             <a:extLst>
               <a:ext uri="{FF2B5EF4-FFF2-40B4-BE49-F238E27FC236}">
                 <a16:creationId xmlns:a16="http://schemas.microsoft.com/office/drawing/2014/main" id="{018336BB-E34A-45BB-880C-5F032537C909}"/>
@@ -3892,7 +3789,7 @@
           <p:nvPr/>
         </p:nvPicPr>
         <p:blipFill>
-          <a:blip r:embed="rId14">
+          <a:blip r:embed="rId2">
             <a:extLst>
               <a:ext uri="{28A0092B-C50C-407E-A947-70E740481C1C}">
                 <a14:useLocalDpi xmlns:a14="http://schemas.microsoft.com/office/drawing/2010/main" val="0"/>
@@ -3913,36 +3810,6 @@
           </a:prstGeom>
         </p:spPr>
       </p:pic>
-    </p:spTree>
-    <p:extLst>
-      <p:ext uri="{BB962C8B-B14F-4D97-AF65-F5344CB8AC3E}">
-        <p14:creationId xmlns:p14="http://schemas.microsoft.com/office/powerpoint/2010/main" val="95992585"/>
-      </p:ext>
-    </p:extLst>
-  </p:cSld>
-  <p:clrMapOvr>
-    <a:masterClrMapping/>
-  </p:clrMapOvr>
-</p:sld>
-</file>
-
-<file path=ppt/slides/slideTemplate.xml><?xml version="1.0" encoding="utf-8"?>
-<p:sld xmlns:a="http://schemas.openxmlformats.org/drawingml/2006/main" xmlns:r="http://schemas.openxmlformats.org/officeDocument/2006/relationships" xmlns:p="http://schemas.openxmlformats.org/presentationml/2006/main">
-  <p:cSld>
-    <p:spTree>
-      <p:nvGrpSpPr>
-        <p:cNvPr id="1" name=""/>
-        <p:cNvGrpSpPr/>
-        <p:nvPr/>
-      </p:nvGrpSpPr>
-      <p:grpSpPr>
-        <a:xfrm>
-          <a:off x="0" y="0"/>
-          <a:ext cx="0" cy="0"/>
-          <a:chOff x="0" y="0"/>
-          <a:chExt cx="0" cy="0"/>
-        </a:xfrm>
-      </p:grpSpPr>
     </p:spTree>
     <p:extLst>
       <p:ext uri="{BB962C8B-B14F-4D97-AF65-F5344CB8AC3E}">
